--- a/Report/APB - SHA.pptx
+++ b/Report/APB - SHA.pptx
@@ -27579,36 +27579,6 @@
           </a:p>
         </p:txBody>
       </p:sp>
-      <p:pic>
-        <p:nvPicPr>
-          <p:cNvPr id="7" name="Picture 6">
-            <a:extLst>
-              <a:ext uri="{FF2B5EF4-FFF2-40B4-BE49-F238E27FC236}">
-                <a16:creationId xmlns:a16="http://schemas.microsoft.com/office/drawing/2014/main" id="{BB151CDE-7532-DC22-82C1-0662D14EB687}"/>
-              </a:ext>
-            </a:extLst>
-          </p:cNvPr>
-          <p:cNvPicPr>
-            <a:picLocks noChangeAspect="1"/>
-          </p:cNvPicPr>
-          <p:nvPr/>
-        </p:nvPicPr>
-        <p:blipFill>
-          <a:blip r:embed="rId2"/>
-          <a:stretch>
-            <a:fillRect/>
-          </a:stretch>
-        </p:blipFill>
-        <p:spPr>
-          <a:xfrm>
-            <a:off x="3314700" y="1273405"/>
-            <a:ext cx="5562600" cy="2631307"/>
-          </a:xfrm>
-          <a:prstGeom prst="rect">
-            <a:avLst/>
-          </a:prstGeom>
-        </p:spPr>
-      </p:pic>
       <p:graphicFrame>
         <p:nvGraphicFramePr>
           <p:cNvPr id="8" name="Table 7">
@@ -27624,7 +27594,7 @@
           <p:nvPr>
             <p:extLst>
               <p:ext uri="{D42A27DB-BD31-4B8C-83A1-F6EECF244321}">
-                <p14:modId xmlns:p14="http://schemas.microsoft.com/office/powerpoint/2010/main" val="984463703"/>
+                <p14:modId xmlns:p14="http://schemas.microsoft.com/office/powerpoint/2010/main" val="3475759532"/>
               </p:ext>
             </p:extLst>
           </p:nvPr>
@@ -27838,7 +27808,21 @@
                           <a:latin typeface="Arial" panose="020B0604020202020204" pitchFamily="34" charset="0"/>
                           <a:cs typeface="Arial" panose="020B0604020202020204" pitchFamily="34" charset="0"/>
                         </a:rPr>
-                        <a:t>PADDR[30:0]</a:t>
+                        <a:t>PADDR[</a:t>
+                      </a:r>
+                      <a:r>
+                        <a:rPr lang="vi-VN" sz="1600" dirty="0">
+                          <a:latin typeface="Arial" panose="020B0604020202020204" pitchFamily="34" charset="0"/>
+                          <a:cs typeface="Arial" panose="020B0604020202020204" pitchFamily="34" charset="0"/>
+                        </a:rPr>
+                        <a:t>15</a:t>
+                      </a:r>
+                      <a:r>
+                        <a:rPr lang="en-US" sz="1600" dirty="0">
+                          <a:latin typeface="Arial" panose="020B0604020202020204" pitchFamily="34" charset="0"/>
+                          <a:cs typeface="Arial" panose="020B0604020202020204" pitchFamily="34" charset="0"/>
+                        </a:rPr>
+                        <a:t>:0]</a:t>
                       </a:r>
                     </a:p>
                   </a:txBody>
@@ -27888,6 +27872,36 @@
           </a:graphicData>
         </a:graphic>
       </p:graphicFrame>
+      <p:pic>
+        <p:nvPicPr>
+          <p:cNvPr id="9" name="Picture 8">
+            <a:extLst>
+              <a:ext uri="{FF2B5EF4-FFF2-40B4-BE49-F238E27FC236}">
+                <a16:creationId xmlns:a16="http://schemas.microsoft.com/office/drawing/2014/main" id="{28F9C8A8-0B47-32FD-72E1-E3D6F9934436}"/>
+              </a:ext>
+            </a:extLst>
+          </p:cNvPr>
+          <p:cNvPicPr>
+            <a:picLocks noChangeAspect="1"/>
+          </p:cNvPicPr>
+          <p:nvPr/>
+        </p:nvPicPr>
+        <p:blipFill>
+          <a:blip r:embed="rId2"/>
+          <a:stretch>
+            <a:fillRect/>
+          </a:stretch>
+        </p:blipFill>
+        <p:spPr>
+          <a:xfrm>
+            <a:off x="3339956" y="1275080"/>
+            <a:ext cx="5511959" cy="2538294"/>
+          </a:xfrm>
+          <a:prstGeom prst="rect">
+            <a:avLst/>
+          </a:prstGeom>
+        </p:spPr>
+      </p:pic>
     </p:spTree>
     <p:extLst>
       <p:ext uri="{BB962C8B-B14F-4D97-AF65-F5344CB8AC3E}">
@@ -28164,10 +28178,10 @@
       </p:sp>
       <p:pic>
         <p:nvPicPr>
-          <p:cNvPr id="9" name="Picture 8">
+          <p:cNvPr id="7" name="Picture 6">
             <a:extLst>
               <a:ext uri="{FF2B5EF4-FFF2-40B4-BE49-F238E27FC236}">
-                <a16:creationId xmlns:a16="http://schemas.microsoft.com/office/drawing/2014/main" id="{211DD1A4-26D8-20F7-0B2D-F66D4A1CED24}"/>
+                <a16:creationId xmlns:a16="http://schemas.microsoft.com/office/drawing/2014/main" id="{A7A51157-FFF3-BE5A-63EF-B4763B285AE1}"/>
               </a:ext>
             </a:extLst>
           </p:cNvPr>
@@ -28184,8 +28198,8 @@
         </p:blipFill>
         <p:spPr>
           <a:xfrm>
-            <a:off x="1438947" y="1327269"/>
-            <a:ext cx="9313977" cy="5240648"/>
+            <a:off x="1967417" y="1317784"/>
+            <a:ext cx="8929183" cy="5202979"/>
           </a:xfrm>
           <a:prstGeom prst="rect">
             <a:avLst/>
@@ -31992,7 +32006,7 @@
           <p:nvPr>
             <p:extLst>
               <p:ext uri="{D42A27DB-BD31-4B8C-83A1-F6EECF244321}">
-                <p14:modId xmlns:p14="http://schemas.microsoft.com/office/powerpoint/2010/main" val="1644539298"/>
+                <p14:modId xmlns:p14="http://schemas.microsoft.com/office/powerpoint/2010/main" val="1582245288"/>
               </p:ext>
             </p:extLst>
           </p:nvPr>
@@ -32930,7 +32944,7 @@
                         <a:t>Access (Read/Write) address </a:t>
                       </a:r>
                       <a:r>
-                        <a:rPr lang="en-US" sz="1600" b="0" i="0" dirty="0">
+                        <a:rPr lang="vi-VN" sz="1600" b="0" i="0" dirty="0">
                           <a:solidFill>
                             <a:schemeClr val="dk1"/>
                           </a:solidFill>
@@ -32939,14 +32953,35 @@
                           <a:ea typeface="+mn-ea"/>
                           <a:cs typeface="+mn-cs"/>
                         </a:rPr>
-                        <a:t>0x00005000</a:t>
+                        <a:t>0x00010000</a:t>
                       </a:r>
                       <a:r>
                         <a:rPr lang="en-US" sz="1600" dirty="0">
                           <a:latin typeface="Arial" panose="020B0604020202020204" pitchFamily="34" charset="0"/>
                           <a:cs typeface="Arial" panose="020B0604020202020204" pitchFamily="34" charset="0"/>
                         </a:rPr>
-                        <a:t> (PADDR[30:0] is 1400 in Decimal), which exceeds the memory size (1024) of the Slave.</a:t>
+                        <a:t>, which exceeds the memory size (</a:t>
+                      </a:r>
+                      <a:r>
+                        <a:rPr lang="vi-VN" sz="1600" dirty="0" err="1">
+                          <a:latin typeface="Arial" panose="020B0604020202020204" pitchFamily="34" charset="0"/>
+                          <a:cs typeface="Arial" panose="020B0604020202020204" pitchFamily="34" charset="0"/>
+                        </a:rPr>
+                        <a:t>pADDR</a:t>
+                      </a:r>
+                      <a:r>
+                        <a:rPr lang="vi-VN" sz="1600" dirty="0">
+                          <a:latin typeface="Arial" panose="020B0604020202020204" pitchFamily="34" charset="0"/>
+                          <a:cs typeface="Arial" panose="020B0604020202020204" pitchFamily="34" charset="0"/>
+                        </a:rPr>
+                        <a:t>[15:0]</a:t>
+                      </a:r>
+                      <a:r>
+                        <a:rPr lang="en-US" sz="1600" dirty="0">
+                          <a:latin typeface="Arial" panose="020B0604020202020204" pitchFamily="34" charset="0"/>
+                          <a:cs typeface="Arial" panose="020B0604020202020204" pitchFamily="34" charset="0"/>
+                        </a:rPr>
+                        <a:t>) of the Slave.</a:t>
                       </a:r>
                     </a:p>
                   </a:txBody>
@@ -36359,14 +36394,24 @@
               <a:t>ADDR: </a:t>
             </a:r>
             <a:r>
-              <a:rPr lang="en-ID" dirty="0">
+              <a:rPr lang="vi-VN" dirty="0">
                 <a:solidFill>
                   <a:schemeClr val="dk1"/>
                 </a:solidFill>
                 <a:latin typeface="Arial" panose="020B0604020202020204" pitchFamily="34" charset="0"/>
                 <a:cs typeface="Arial" panose="020B0604020202020204" pitchFamily="34" charset="0"/>
               </a:rPr>
-              <a:t>0x5000</a:t>
+              <a:t>0x00010</a:t>
+            </a:r>
+            <a:r>
+              <a:rPr lang="en-ID" dirty="0">
+                <a:solidFill>
+                  <a:schemeClr val="dk1"/>
+                </a:solidFill>
+                <a:latin typeface="Arial" panose="020B0604020202020204" pitchFamily="34" charset="0"/>
+                <a:cs typeface="Arial" panose="020B0604020202020204" pitchFamily="34" charset="0"/>
+              </a:rPr>
+              <a:t>000</a:t>
             </a:r>
           </a:p>
           <a:p>
@@ -36406,10 +36451,10 @@
       </p:sp>
       <p:pic>
         <p:nvPicPr>
-          <p:cNvPr id="5" name="Picture 4">
+          <p:cNvPr id="6" name="Picture 5">
             <a:extLst>
               <a:ext uri="{FF2B5EF4-FFF2-40B4-BE49-F238E27FC236}">
-                <a16:creationId xmlns:a16="http://schemas.microsoft.com/office/drawing/2014/main" id="{09E623EE-D456-370A-90F6-B45A8155581B}"/>
+                <a16:creationId xmlns:a16="http://schemas.microsoft.com/office/drawing/2014/main" id="{640F3A47-C996-1919-41FF-1B8D087D800E}"/>
               </a:ext>
             </a:extLst>
           </p:cNvPr>
@@ -36426,8 +36471,8 @@
         </p:blipFill>
         <p:spPr>
           <a:xfrm>
-            <a:off x="508317" y="1828800"/>
-            <a:ext cx="11250595" cy="2057687"/>
+            <a:off x="508743" y="1981200"/>
+            <a:ext cx="11174384" cy="2162477"/>
           </a:xfrm>
           <a:prstGeom prst="rect">
             <a:avLst/>
@@ -37211,10 +37256,10 @@
       </p:sp>
       <p:pic>
         <p:nvPicPr>
-          <p:cNvPr id="5" name="Picture 4">
+          <p:cNvPr id="6" name="Picture 5">
             <a:extLst>
               <a:ext uri="{FF2B5EF4-FFF2-40B4-BE49-F238E27FC236}">
-                <a16:creationId xmlns:a16="http://schemas.microsoft.com/office/drawing/2014/main" id="{5DEF7D1D-63E0-0581-349C-F57B52AA7455}"/>
+                <a16:creationId xmlns:a16="http://schemas.microsoft.com/office/drawing/2014/main" id="{F413F8B5-F044-BA85-3E0D-09985C044E69}"/>
               </a:ext>
             </a:extLst>
           </p:cNvPr>
@@ -37231,8 +37276,8 @@
         </p:blipFill>
         <p:spPr>
           <a:xfrm>
-            <a:off x="152400" y="2057400"/>
-            <a:ext cx="11887200" cy="3461977"/>
+            <a:off x="0" y="1630614"/>
+            <a:ext cx="12192000" cy="3596772"/>
           </a:xfrm>
           <a:prstGeom prst="rect">
             <a:avLst/>
